--- a/latex/lec3/report_2412747_3.pptx
+++ b/latex/lec3/report_2412747_3.pptx
@@ -110,6 +110,11 @@
       </a:defRPr>
     </a:lvl9pPr>
   </p:defaultTextStyle>
+  <p:extLst>
+    <p:ext uri="{EFAFB233-063F-42B5-8137-9DF3F51BA10A}">
+      <p15:sldGuideLst xmlns:p15="http://schemas.microsoft.com/office/powerpoint/2012/main"/>
+    </p:ext>
+  </p:extLst>
 </p:presentation>
 </file>
 
@@ -3615,6 +3620,87 @@
           <a:chExt cx="0" cy="0"/>
         </a:xfrm>
       </p:grpSpPr>
+      <p:pic>
+        <p:nvPicPr>
+          <p:cNvPr id="3" name="図 2">
+            <a:extLst>
+              <a:ext uri="{FF2B5EF4-FFF2-40B4-BE49-F238E27FC236}">
+                <a16:creationId xmlns:a16="http://schemas.microsoft.com/office/drawing/2014/main" id="{448DFA39-DCBF-5429-A576-ECF47268717C}"/>
+              </a:ext>
+            </a:extLst>
+          </p:cNvPr>
+          <p:cNvPicPr>
+            <a:picLocks noChangeAspect="1"/>
+          </p:cNvPicPr>
+          <p:nvPr/>
+        </p:nvPicPr>
+        <p:blipFill>
+          <a:blip r:embed="rId2"/>
+          <a:stretch>
+            <a:fillRect/>
+          </a:stretch>
+        </p:blipFill>
+        <p:spPr>
+          <a:xfrm>
+            <a:off x="3810000" y="1485900"/>
+            <a:ext cx="4572000" cy="3886200"/>
+          </a:xfrm>
+          <a:prstGeom prst="rect">
+            <a:avLst/>
+          </a:prstGeom>
+        </p:spPr>
+      </p:pic>
+      <p:sp>
+        <p:nvSpPr>
+          <p:cNvPr id="4" name="テキスト ボックス 3">
+            <a:extLst>
+              <a:ext uri="{FF2B5EF4-FFF2-40B4-BE49-F238E27FC236}">
+                <a16:creationId xmlns:a16="http://schemas.microsoft.com/office/drawing/2014/main" id="{6179A269-E7DE-96B2-8BB5-984407C2F727}"/>
+              </a:ext>
+            </a:extLst>
+          </p:cNvPr>
+          <p:cNvSpPr txBox="1"/>
+          <p:nvPr/>
+        </p:nvSpPr>
+        <p:spPr>
+          <a:xfrm>
+            <a:off x="4836681" y="5372100"/>
+            <a:ext cx="2518638" cy="369332"/>
+          </a:xfrm>
+          <a:prstGeom prst="rect">
+            <a:avLst/>
+          </a:prstGeom>
+          <a:noFill/>
+        </p:spPr>
+        <p:txBody>
+          <a:bodyPr wrap="none" rtlCol="0">
+            <a:spAutoFit/>
+          </a:bodyPr>
+          <a:lstStyle/>
+          <a:p>
+            <a:r>
+              <a:rPr kumimoji="1" lang="ja-JP" altLang="en-US"/>
+              <a:t>図</a:t>
+            </a:r>
+            <a:r>
+              <a:rPr kumimoji="1" lang="en-US" altLang="ja-JP" dirty="0"/>
+              <a:t>1</a:t>
+            </a:r>
+            <a:r>
+              <a:rPr kumimoji="1" lang="ja-JP" altLang="en-US"/>
+              <a:t>　課題</a:t>
+            </a:r>
+            <a:r>
+              <a:rPr kumimoji="1" lang="en-US" altLang="ja-JP" dirty="0"/>
+              <a:t>1</a:t>
+            </a:r>
+            <a:r>
+              <a:rPr kumimoji="1" lang="ja-JP" altLang="en-US"/>
+              <a:t>の実行結果</a:t>
+            </a:r>
+          </a:p>
+        </p:txBody>
+      </p:sp>
     </p:spTree>
     <p:extLst>
       <p:ext uri="{BB962C8B-B14F-4D97-AF65-F5344CB8AC3E}">
@@ -3645,6 +3731,87 @@
           <a:chExt cx="0" cy="0"/>
         </a:xfrm>
       </p:grpSpPr>
+      <p:pic>
+        <p:nvPicPr>
+          <p:cNvPr id="3" name="図 2">
+            <a:extLst>
+              <a:ext uri="{FF2B5EF4-FFF2-40B4-BE49-F238E27FC236}">
+                <a16:creationId xmlns:a16="http://schemas.microsoft.com/office/drawing/2014/main" id="{E23A0594-D059-74E0-88F7-AF4F033CC517}"/>
+              </a:ext>
+            </a:extLst>
+          </p:cNvPr>
+          <p:cNvPicPr>
+            <a:picLocks noChangeAspect="1"/>
+          </p:cNvPicPr>
+          <p:nvPr/>
+        </p:nvPicPr>
+        <p:blipFill>
+          <a:blip r:embed="rId2"/>
+          <a:stretch>
+            <a:fillRect/>
+          </a:stretch>
+        </p:blipFill>
+        <p:spPr>
+          <a:xfrm>
+            <a:off x="3797300" y="1943100"/>
+            <a:ext cx="4597400" cy="2971800"/>
+          </a:xfrm>
+          <a:prstGeom prst="rect">
+            <a:avLst/>
+          </a:prstGeom>
+        </p:spPr>
+      </p:pic>
+      <p:sp>
+        <p:nvSpPr>
+          <p:cNvPr id="4" name="テキスト ボックス 3">
+            <a:extLst>
+              <a:ext uri="{FF2B5EF4-FFF2-40B4-BE49-F238E27FC236}">
+                <a16:creationId xmlns:a16="http://schemas.microsoft.com/office/drawing/2014/main" id="{5E541EF3-97FD-1B8A-1E6A-2F69043540BC}"/>
+              </a:ext>
+            </a:extLst>
+          </p:cNvPr>
+          <p:cNvSpPr txBox="1"/>
+          <p:nvPr/>
+        </p:nvSpPr>
+        <p:spPr>
+          <a:xfrm>
+            <a:off x="4836681" y="4914900"/>
+            <a:ext cx="2518638" cy="369332"/>
+          </a:xfrm>
+          <a:prstGeom prst="rect">
+            <a:avLst/>
+          </a:prstGeom>
+          <a:noFill/>
+        </p:spPr>
+        <p:txBody>
+          <a:bodyPr wrap="none" rtlCol="0">
+            <a:spAutoFit/>
+          </a:bodyPr>
+          <a:lstStyle/>
+          <a:p>
+            <a:r>
+              <a:rPr kumimoji="1" lang="ja-JP" altLang="en-US"/>
+              <a:t>図</a:t>
+            </a:r>
+            <a:r>
+              <a:rPr kumimoji="1" lang="en-US" altLang="ja-JP" dirty="0"/>
+              <a:t>2</a:t>
+            </a:r>
+            <a:r>
+              <a:rPr kumimoji="1" lang="ja-JP" altLang="en-US"/>
+              <a:t>　課題</a:t>
+            </a:r>
+            <a:r>
+              <a:rPr lang="en-US" altLang="ja-JP" dirty="0"/>
+              <a:t>2</a:t>
+            </a:r>
+            <a:r>
+              <a:rPr kumimoji="1" lang="ja-JP" altLang="en-US"/>
+              <a:t>の実行結果</a:t>
+            </a:r>
+          </a:p>
+        </p:txBody>
+      </p:sp>
     </p:spTree>
     <p:extLst>
       <p:ext uri="{BB962C8B-B14F-4D97-AF65-F5344CB8AC3E}">
@@ -3675,6 +3842,87 @@
           <a:chExt cx="0" cy="0"/>
         </a:xfrm>
       </p:grpSpPr>
+      <p:pic>
+        <p:nvPicPr>
+          <p:cNvPr id="3" name="図 2">
+            <a:extLst>
+              <a:ext uri="{FF2B5EF4-FFF2-40B4-BE49-F238E27FC236}">
+                <a16:creationId xmlns:a16="http://schemas.microsoft.com/office/drawing/2014/main" id="{74CF0C0A-8BD9-9E61-1EE4-FE97C2564572}"/>
+              </a:ext>
+            </a:extLst>
+          </p:cNvPr>
+          <p:cNvPicPr>
+            <a:picLocks noChangeAspect="1"/>
+          </p:cNvPicPr>
+          <p:nvPr/>
+        </p:nvPicPr>
+        <p:blipFill>
+          <a:blip r:embed="rId2"/>
+          <a:stretch>
+            <a:fillRect/>
+          </a:stretch>
+        </p:blipFill>
+        <p:spPr>
+          <a:xfrm>
+            <a:off x="4356100" y="3327400"/>
+            <a:ext cx="3479800" cy="203200"/>
+          </a:xfrm>
+          <a:prstGeom prst="rect">
+            <a:avLst/>
+          </a:prstGeom>
+        </p:spPr>
+      </p:pic>
+      <p:sp>
+        <p:nvSpPr>
+          <p:cNvPr id="4" name="テキスト ボックス 3">
+            <a:extLst>
+              <a:ext uri="{FF2B5EF4-FFF2-40B4-BE49-F238E27FC236}">
+                <a16:creationId xmlns:a16="http://schemas.microsoft.com/office/drawing/2014/main" id="{BF938F6F-F590-59F0-F1CF-770ECF7E124E}"/>
+              </a:ext>
+            </a:extLst>
+          </p:cNvPr>
+          <p:cNvSpPr txBox="1"/>
+          <p:nvPr/>
+        </p:nvSpPr>
+        <p:spPr>
+          <a:xfrm>
+            <a:off x="4836681" y="3530600"/>
+            <a:ext cx="2518638" cy="369332"/>
+          </a:xfrm>
+          <a:prstGeom prst="rect">
+            <a:avLst/>
+          </a:prstGeom>
+          <a:noFill/>
+        </p:spPr>
+        <p:txBody>
+          <a:bodyPr wrap="none" rtlCol="0">
+            <a:spAutoFit/>
+          </a:bodyPr>
+          <a:lstStyle/>
+          <a:p>
+            <a:r>
+              <a:rPr kumimoji="1" lang="ja-JP" altLang="en-US"/>
+              <a:t>図</a:t>
+            </a:r>
+            <a:r>
+              <a:rPr lang="en-US" altLang="ja-JP" dirty="0"/>
+              <a:t>3</a:t>
+            </a:r>
+            <a:r>
+              <a:rPr kumimoji="1" lang="ja-JP" altLang="en-US"/>
+              <a:t>　課題</a:t>
+            </a:r>
+            <a:r>
+              <a:rPr lang="en-US" altLang="ja-JP" dirty="0"/>
+              <a:t>3</a:t>
+            </a:r>
+            <a:r>
+              <a:rPr kumimoji="1" lang="ja-JP" altLang="en-US"/>
+              <a:t>の実行結果</a:t>
+            </a:r>
+          </a:p>
+        </p:txBody>
+      </p:sp>
     </p:spTree>
     <p:extLst>
       <p:ext uri="{BB962C8B-B14F-4D97-AF65-F5344CB8AC3E}">
@@ -3705,6 +3953,87 @@
           <a:chExt cx="0" cy="0"/>
         </a:xfrm>
       </p:grpSpPr>
+      <p:pic>
+        <p:nvPicPr>
+          <p:cNvPr id="3" name="図 2">
+            <a:extLst>
+              <a:ext uri="{FF2B5EF4-FFF2-40B4-BE49-F238E27FC236}">
+                <a16:creationId xmlns:a16="http://schemas.microsoft.com/office/drawing/2014/main" id="{C87C9D0D-5F55-A0FB-CC7F-11FC1D4BEFA2}"/>
+              </a:ext>
+            </a:extLst>
+          </p:cNvPr>
+          <p:cNvPicPr>
+            <a:picLocks noChangeAspect="1"/>
+          </p:cNvPicPr>
+          <p:nvPr/>
+        </p:nvPicPr>
+        <p:blipFill>
+          <a:blip r:embed="rId2"/>
+          <a:stretch>
+            <a:fillRect/>
+          </a:stretch>
+        </p:blipFill>
+        <p:spPr>
+          <a:xfrm>
+            <a:off x="4013200" y="3321050"/>
+            <a:ext cx="4165600" cy="215900"/>
+          </a:xfrm>
+          <a:prstGeom prst="rect">
+            <a:avLst/>
+          </a:prstGeom>
+        </p:spPr>
+      </p:pic>
+      <p:sp>
+        <p:nvSpPr>
+          <p:cNvPr id="4" name="テキスト ボックス 3">
+            <a:extLst>
+              <a:ext uri="{FF2B5EF4-FFF2-40B4-BE49-F238E27FC236}">
+                <a16:creationId xmlns:a16="http://schemas.microsoft.com/office/drawing/2014/main" id="{B3EBB74B-E8D5-EAE9-513F-D99AA80EBDDC}"/>
+              </a:ext>
+            </a:extLst>
+          </p:cNvPr>
+          <p:cNvSpPr txBox="1"/>
+          <p:nvPr/>
+        </p:nvSpPr>
+        <p:spPr>
+          <a:xfrm>
+            <a:off x="4722066" y="3536950"/>
+            <a:ext cx="2747868" cy="369332"/>
+          </a:xfrm>
+          <a:prstGeom prst="rect">
+            <a:avLst/>
+          </a:prstGeom>
+          <a:noFill/>
+        </p:spPr>
+        <p:txBody>
+          <a:bodyPr wrap="none" rtlCol="0">
+            <a:spAutoFit/>
+          </a:bodyPr>
+          <a:lstStyle/>
+          <a:p>
+            <a:r>
+              <a:rPr kumimoji="1" lang="ja-JP" altLang="en-US"/>
+              <a:t>図</a:t>
+            </a:r>
+            <a:r>
+              <a:rPr lang="en-US" altLang="ja-JP" dirty="0"/>
+              <a:t>4-1</a:t>
+            </a:r>
+            <a:r>
+              <a:rPr kumimoji="1" lang="ja-JP" altLang="en-US"/>
+              <a:t>　課題</a:t>
+            </a:r>
+            <a:r>
+              <a:rPr lang="en-US" altLang="ja-JP" dirty="0"/>
+              <a:t>4</a:t>
+            </a:r>
+            <a:r>
+              <a:rPr kumimoji="1" lang="ja-JP" altLang="en-US"/>
+              <a:t>の実行結果</a:t>
+            </a:r>
+          </a:p>
+        </p:txBody>
+      </p:sp>
     </p:spTree>
     <p:extLst>
       <p:ext uri="{BB962C8B-B14F-4D97-AF65-F5344CB8AC3E}">
@@ -3735,6 +4064,87 @@
           <a:chExt cx="0" cy="0"/>
         </a:xfrm>
       </p:grpSpPr>
+      <p:pic>
+        <p:nvPicPr>
+          <p:cNvPr id="3" name="図 2">
+            <a:extLst>
+              <a:ext uri="{FF2B5EF4-FFF2-40B4-BE49-F238E27FC236}">
+                <a16:creationId xmlns:a16="http://schemas.microsoft.com/office/drawing/2014/main" id="{1681CE80-F9C7-9D74-9445-5386772D790B}"/>
+              </a:ext>
+            </a:extLst>
+          </p:cNvPr>
+          <p:cNvPicPr>
+            <a:picLocks noChangeAspect="1"/>
+          </p:cNvPicPr>
+          <p:nvPr/>
+        </p:nvPicPr>
+        <p:blipFill>
+          <a:blip r:embed="rId2"/>
+          <a:stretch>
+            <a:fillRect/>
+          </a:stretch>
+        </p:blipFill>
+        <p:spPr>
+          <a:xfrm>
+            <a:off x="2813050" y="1441450"/>
+            <a:ext cx="6565900" cy="3975100"/>
+          </a:xfrm>
+          <a:prstGeom prst="rect">
+            <a:avLst/>
+          </a:prstGeom>
+        </p:spPr>
+      </p:pic>
+      <p:sp>
+        <p:nvSpPr>
+          <p:cNvPr id="4" name="テキスト ボックス 3">
+            <a:extLst>
+              <a:ext uri="{FF2B5EF4-FFF2-40B4-BE49-F238E27FC236}">
+                <a16:creationId xmlns:a16="http://schemas.microsoft.com/office/drawing/2014/main" id="{6E6BC22C-AE1C-1928-2AF9-3F9059290CB2}"/>
+              </a:ext>
+            </a:extLst>
+          </p:cNvPr>
+          <p:cNvSpPr txBox="1"/>
+          <p:nvPr/>
+        </p:nvSpPr>
+        <p:spPr>
+          <a:xfrm>
+            <a:off x="4722066" y="5416550"/>
+            <a:ext cx="2747868" cy="369332"/>
+          </a:xfrm>
+          <a:prstGeom prst="rect">
+            <a:avLst/>
+          </a:prstGeom>
+          <a:noFill/>
+        </p:spPr>
+        <p:txBody>
+          <a:bodyPr wrap="none" rtlCol="0">
+            <a:spAutoFit/>
+          </a:bodyPr>
+          <a:lstStyle/>
+          <a:p>
+            <a:r>
+              <a:rPr kumimoji="1" lang="ja-JP" altLang="en-US"/>
+              <a:t>図</a:t>
+            </a:r>
+            <a:r>
+              <a:rPr lang="en-US" altLang="ja-JP" dirty="0"/>
+              <a:t>4-2</a:t>
+            </a:r>
+            <a:r>
+              <a:rPr kumimoji="1" lang="ja-JP" altLang="en-US"/>
+              <a:t>　課題</a:t>
+            </a:r>
+            <a:r>
+              <a:rPr lang="en-US" altLang="ja-JP" dirty="0"/>
+              <a:t>4</a:t>
+            </a:r>
+            <a:r>
+              <a:rPr kumimoji="1" lang="ja-JP" altLang="en-US"/>
+              <a:t>の出力結果</a:t>
+            </a:r>
+          </a:p>
+        </p:txBody>
+      </p:sp>
     </p:spTree>
     <p:extLst>
       <p:ext uri="{BB962C8B-B14F-4D97-AF65-F5344CB8AC3E}">
@@ -3765,6 +4175,91 @@
           <a:chExt cx="0" cy="0"/>
         </a:xfrm>
       </p:grpSpPr>
+      <p:pic>
+        <p:nvPicPr>
+          <p:cNvPr id="3" name="図 2">
+            <a:extLst>
+              <a:ext uri="{FF2B5EF4-FFF2-40B4-BE49-F238E27FC236}">
+                <a16:creationId xmlns:a16="http://schemas.microsoft.com/office/drawing/2014/main" id="{71677881-1152-A900-0326-F44805DCDD45}"/>
+              </a:ext>
+            </a:extLst>
+          </p:cNvPr>
+          <p:cNvPicPr>
+            <a:picLocks noChangeAspect="1"/>
+          </p:cNvPicPr>
+          <p:nvPr/>
+        </p:nvPicPr>
+        <p:blipFill>
+          <a:blip r:embed="rId2"/>
+          <a:stretch>
+            <a:fillRect/>
+          </a:stretch>
+        </p:blipFill>
+        <p:spPr>
+          <a:xfrm>
+            <a:off x="3822700" y="3194050"/>
+            <a:ext cx="4546600" cy="469900"/>
+          </a:xfrm>
+          <a:prstGeom prst="rect">
+            <a:avLst/>
+          </a:prstGeom>
+        </p:spPr>
+      </p:pic>
+      <p:sp>
+        <p:nvSpPr>
+          <p:cNvPr id="4" name="テキスト ボックス 3">
+            <a:extLst>
+              <a:ext uri="{FF2B5EF4-FFF2-40B4-BE49-F238E27FC236}">
+                <a16:creationId xmlns:a16="http://schemas.microsoft.com/office/drawing/2014/main" id="{9121E448-7445-E37C-8709-367DDCB5567D}"/>
+              </a:ext>
+            </a:extLst>
+          </p:cNvPr>
+          <p:cNvSpPr txBox="1"/>
+          <p:nvPr/>
+        </p:nvSpPr>
+        <p:spPr>
+          <a:xfrm>
+            <a:off x="4722066" y="3663950"/>
+            <a:ext cx="2747868" cy="369332"/>
+          </a:xfrm>
+          <a:prstGeom prst="rect">
+            <a:avLst/>
+          </a:prstGeom>
+          <a:noFill/>
+        </p:spPr>
+        <p:txBody>
+          <a:bodyPr wrap="none" rtlCol="0">
+            <a:spAutoFit/>
+          </a:bodyPr>
+          <a:lstStyle/>
+          <a:p>
+            <a:r>
+              <a:rPr kumimoji="1" lang="ja-JP" altLang="en-US"/>
+              <a:t>図</a:t>
+            </a:r>
+            <a:r>
+              <a:rPr kumimoji="1" lang="en-US" altLang="ja-JP" dirty="0"/>
+              <a:t>5</a:t>
+            </a:r>
+            <a:r>
+              <a:rPr lang="en-US" altLang="ja-JP" dirty="0"/>
+              <a:t>-1</a:t>
+            </a:r>
+            <a:r>
+              <a:rPr kumimoji="1" lang="ja-JP" altLang="en-US"/>
+              <a:t>　課題</a:t>
+            </a:r>
+            <a:r>
+              <a:rPr kumimoji="1" lang="en-US" altLang="ja-JP" dirty="0"/>
+              <a:t>5</a:t>
+            </a:r>
+            <a:r>
+              <a:rPr kumimoji="1" lang="ja-JP" altLang="en-US"/>
+              <a:t>の実行結果</a:t>
+            </a:r>
+          </a:p>
+        </p:txBody>
+      </p:sp>
     </p:spTree>
     <p:extLst>
       <p:ext uri="{BB962C8B-B14F-4D97-AF65-F5344CB8AC3E}">
